--- a/powerpoints/tech_stack.pptx
+++ b/powerpoints/tech_stack.pptx
@@ -254,7 +254,7 @@
           <a:p>
             <a:fld id="{19305BC5-265C-4494-B493-7CC5B5C2D7A6}" type="datetimeFigureOut">
               <a:rPr lang="en-US" smtClean="0"/>
-              <a:t>27-Oct-25</a:t>
+              <a:t>01-May-26</a:t>
             </a:fld>
             <a:endParaRPr lang="en-US"/>
           </a:p>
@@ -424,7 +424,7 @@
           <a:p>
             <a:fld id="{19305BC5-265C-4494-B493-7CC5B5C2D7A6}" type="datetimeFigureOut">
               <a:rPr lang="en-US" smtClean="0"/>
-              <a:t>27-Oct-25</a:t>
+              <a:t>01-May-26</a:t>
             </a:fld>
             <a:endParaRPr lang="en-US"/>
           </a:p>
@@ -604,7 +604,7 @@
           <a:p>
             <a:fld id="{19305BC5-265C-4494-B493-7CC5B5C2D7A6}" type="datetimeFigureOut">
               <a:rPr lang="en-US" smtClean="0"/>
-              <a:t>27-Oct-25</a:t>
+              <a:t>01-May-26</a:t>
             </a:fld>
             <a:endParaRPr lang="en-US"/>
           </a:p>
@@ -774,7 +774,7 @@
           <a:p>
             <a:fld id="{19305BC5-265C-4494-B493-7CC5B5C2D7A6}" type="datetimeFigureOut">
               <a:rPr lang="en-US" smtClean="0"/>
-              <a:t>27-Oct-25</a:t>
+              <a:t>01-May-26</a:t>
             </a:fld>
             <a:endParaRPr lang="en-US"/>
           </a:p>
@@ -1020,7 +1020,7 @@
           <a:p>
             <a:fld id="{19305BC5-265C-4494-B493-7CC5B5C2D7A6}" type="datetimeFigureOut">
               <a:rPr lang="en-US" smtClean="0"/>
-              <a:t>27-Oct-25</a:t>
+              <a:t>01-May-26</a:t>
             </a:fld>
             <a:endParaRPr lang="en-US"/>
           </a:p>
@@ -1252,7 +1252,7 @@
           <a:p>
             <a:fld id="{19305BC5-265C-4494-B493-7CC5B5C2D7A6}" type="datetimeFigureOut">
               <a:rPr lang="en-US" smtClean="0"/>
-              <a:t>27-Oct-25</a:t>
+              <a:t>01-May-26</a:t>
             </a:fld>
             <a:endParaRPr lang="en-US"/>
           </a:p>
@@ -1619,7 +1619,7 @@
           <a:p>
             <a:fld id="{19305BC5-265C-4494-B493-7CC5B5C2D7A6}" type="datetimeFigureOut">
               <a:rPr lang="en-US" smtClean="0"/>
-              <a:t>27-Oct-25</a:t>
+              <a:t>01-May-26</a:t>
             </a:fld>
             <a:endParaRPr lang="en-US"/>
           </a:p>
@@ -1737,7 +1737,7 @@
           <a:p>
             <a:fld id="{19305BC5-265C-4494-B493-7CC5B5C2D7A6}" type="datetimeFigureOut">
               <a:rPr lang="en-US" smtClean="0"/>
-              <a:t>27-Oct-25</a:t>
+              <a:t>01-May-26</a:t>
             </a:fld>
             <a:endParaRPr lang="en-US"/>
           </a:p>
@@ -1832,7 +1832,7 @@
           <a:p>
             <a:fld id="{19305BC5-265C-4494-B493-7CC5B5C2D7A6}" type="datetimeFigureOut">
               <a:rPr lang="en-US" smtClean="0"/>
-              <a:t>27-Oct-25</a:t>
+              <a:t>01-May-26</a:t>
             </a:fld>
             <a:endParaRPr lang="en-US"/>
           </a:p>
@@ -2109,7 +2109,7 @@
           <a:p>
             <a:fld id="{19305BC5-265C-4494-B493-7CC5B5C2D7A6}" type="datetimeFigureOut">
               <a:rPr lang="en-US" smtClean="0"/>
-              <a:t>27-Oct-25</a:t>
+              <a:t>01-May-26</a:t>
             </a:fld>
             <a:endParaRPr lang="en-US"/>
           </a:p>
@@ -2366,7 +2366,7 @@
           <a:p>
             <a:fld id="{19305BC5-265C-4494-B493-7CC5B5C2D7A6}" type="datetimeFigureOut">
               <a:rPr lang="en-US" smtClean="0"/>
-              <a:t>27-Oct-25</a:t>
+              <a:t>01-May-26</a:t>
             </a:fld>
             <a:endParaRPr lang="en-US"/>
           </a:p>
@@ -2579,7 +2579,7 @@
           <a:p>
             <a:fld id="{19305BC5-265C-4494-B493-7CC5B5C2D7A6}" type="datetimeFigureOut">
               <a:rPr lang="en-US" smtClean="0"/>
-              <a:t>27-Oct-25</a:t>
+              <a:t>01-May-26</a:t>
             </a:fld>
             <a:endParaRPr lang="en-US"/>
           </a:p>
@@ -2984,669 +2984,675 @@
           <a:chExt cx="0" cy="0"/>
         </a:xfrm>
       </p:grpSpPr>
-      <p:grpSp>
-        <p:nvGrpSpPr>
-          <p:cNvPr id="40" name="Group 39">
+      <p:pic>
+        <p:nvPicPr>
+          <p:cNvPr id="11" name="Graphic 10">
             <a:extLst>
               <a:ext uri="{FF2B5EF4-FFF2-40B4-BE49-F238E27FC236}">
-                <a16:creationId xmlns:a16="http://schemas.microsoft.com/office/drawing/2014/main" id="{138BD1FD-F18B-B77B-7327-44398621518F}"/>
+                <a16:creationId xmlns:a16="http://schemas.microsoft.com/office/drawing/2014/main" id="{E1B9C8F8-10C1-70BC-E1FA-F70F4F543640}"/>
               </a:ext>
             </a:extLst>
           </p:cNvPr>
-          <p:cNvGrpSpPr/>
+          <p:cNvPicPr>
+            <a:picLocks noChangeAspect="1"/>
+          </p:cNvPicPr>
           <p:nvPr/>
-        </p:nvGrpSpPr>
-        <p:grpSpPr>
-          <a:xfrm>
-            <a:off x="335666" y="474563"/>
-            <a:ext cx="13889620" cy="5222884"/>
-            <a:chOff x="701058" y="448011"/>
-            <a:chExt cx="13138881" cy="4971973"/>
-          </a:xfrm>
-        </p:grpSpPr>
-        <p:pic>
-          <p:nvPicPr>
-            <p:cNvPr id="7" name="Graphic 6">
-              <a:extLst>
-                <a:ext uri="{FF2B5EF4-FFF2-40B4-BE49-F238E27FC236}">
-                  <a16:creationId xmlns:a16="http://schemas.microsoft.com/office/drawing/2014/main" id="{2647CC60-817D-6881-9E22-34A29DFD35A3}"/>
-                </a:ext>
-              </a:extLst>
-            </p:cNvPr>
-            <p:cNvPicPr>
-              <a:picLocks noChangeAspect="1"/>
-            </p:cNvPicPr>
-            <p:nvPr/>
-          </p:nvPicPr>
-          <p:blipFill>
-            <a:blip r:embed="rId2">
-              <a:extLst>
-                <a:ext uri="{28A0092B-C50C-407E-A947-70E740481C1C}">
-                  <a14:useLocalDpi xmlns:a14="http://schemas.microsoft.com/office/drawing/2010/main" val="0"/>
-                </a:ext>
-                <a:ext uri="{96DAC541-7B7A-43D3-8B79-37D633B846F1}">
-                  <asvg:svgBlip xmlns:asvg="http://schemas.microsoft.com/office/drawing/2016/SVG/main" r:embed="rId3"/>
-                </a:ext>
-              </a:extLst>
-            </a:blip>
-            <a:stretch>
-              <a:fillRect/>
-            </a:stretch>
-          </p:blipFill>
-          <p:spPr>
-            <a:xfrm>
-              <a:off x="2876094" y="799246"/>
-              <a:ext cx="1717749" cy="892067"/>
-            </a:xfrm>
-            <a:prstGeom prst="rect">
-              <a:avLst/>
-            </a:prstGeom>
-          </p:spPr>
-        </p:pic>
-        <p:pic>
-          <p:nvPicPr>
-            <p:cNvPr id="9" name="Picture 8" descr="A blue and white logo&#10;&#10;Description automatically generated">
-              <a:extLst>
-                <a:ext uri="{FF2B5EF4-FFF2-40B4-BE49-F238E27FC236}">
-                  <a16:creationId xmlns:a16="http://schemas.microsoft.com/office/drawing/2014/main" id="{06F7F4A6-6DF6-3915-5F7C-C0775AD8DB34}"/>
-                </a:ext>
-              </a:extLst>
-            </p:cNvPr>
-            <p:cNvPicPr>
-              <a:picLocks noChangeAspect="1"/>
-            </p:cNvPicPr>
-            <p:nvPr/>
-          </p:nvPicPr>
-          <p:blipFill>
-            <a:blip r:embed="rId4">
-              <a:extLst>
-                <a:ext uri="{28A0092B-C50C-407E-A947-70E740481C1C}">
-                  <a14:useLocalDpi xmlns:a14="http://schemas.microsoft.com/office/drawing/2010/main" val="0"/>
-                </a:ext>
-              </a:extLst>
-            </a:blip>
-            <a:stretch>
-              <a:fillRect/>
-            </a:stretch>
-          </p:blipFill>
-          <p:spPr>
-            <a:xfrm>
-              <a:off x="790463" y="448011"/>
-              <a:ext cx="1594529" cy="1594529"/>
-            </a:xfrm>
-            <a:prstGeom prst="rect">
-              <a:avLst/>
-            </a:prstGeom>
-          </p:spPr>
-        </p:pic>
-        <p:pic>
-          <p:nvPicPr>
-            <p:cNvPr id="11" name="Graphic 10">
-              <a:extLst>
-                <a:ext uri="{FF2B5EF4-FFF2-40B4-BE49-F238E27FC236}">
-                  <a16:creationId xmlns:a16="http://schemas.microsoft.com/office/drawing/2014/main" id="{E1B9C8F8-10C1-70BC-E1FA-F70F4F543640}"/>
-                </a:ext>
-              </a:extLst>
-            </p:cNvPr>
-            <p:cNvPicPr>
-              <a:picLocks noChangeAspect="1"/>
-            </p:cNvPicPr>
-            <p:nvPr/>
-          </p:nvPicPr>
-          <p:blipFill>
-            <a:blip r:embed="rId5">
-              <a:extLst>
-                <a:ext uri="{28A0092B-C50C-407E-A947-70E740481C1C}">
-                  <a14:useLocalDpi xmlns:a14="http://schemas.microsoft.com/office/drawing/2010/main" val="0"/>
-                </a:ext>
-                <a:ext uri="{96DAC541-7B7A-43D3-8B79-37D633B846F1}">
-                  <asvg:svgBlip xmlns:asvg="http://schemas.microsoft.com/office/drawing/2016/SVG/main" r:embed="rId6"/>
-                </a:ext>
-              </a:extLst>
-            </a:blip>
-            <a:stretch>
-              <a:fillRect/>
-            </a:stretch>
-          </p:blipFill>
-          <p:spPr>
-            <a:xfrm>
-              <a:off x="7730006" y="448014"/>
-              <a:ext cx="1594530" cy="1594530"/>
-            </a:xfrm>
-            <a:prstGeom prst="rect">
-              <a:avLst/>
-            </a:prstGeom>
-          </p:spPr>
-        </p:pic>
-        <p:pic>
-          <p:nvPicPr>
-            <p:cNvPr id="13" name="Graphic 12">
-              <a:extLst>
-                <a:ext uri="{FF2B5EF4-FFF2-40B4-BE49-F238E27FC236}">
-                  <a16:creationId xmlns:a16="http://schemas.microsoft.com/office/drawing/2014/main" id="{9DFDBC77-46F7-E0BC-BAAC-9FC384A71983}"/>
-                </a:ext>
-              </a:extLst>
-            </p:cNvPr>
-            <p:cNvPicPr>
-              <a:picLocks noChangeAspect="1"/>
-            </p:cNvPicPr>
-            <p:nvPr/>
-          </p:nvPicPr>
-          <p:blipFill>
-            <a:blip r:embed="rId7">
-              <a:extLst>
-                <a:ext uri="{28A0092B-C50C-407E-A947-70E740481C1C}">
-                  <a14:useLocalDpi xmlns:a14="http://schemas.microsoft.com/office/drawing/2010/main" val="0"/>
-                </a:ext>
-                <a:ext uri="{96DAC541-7B7A-43D3-8B79-37D633B846F1}">
-                  <asvg:svgBlip xmlns:asvg="http://schemas.microsoft.com/office/drawing/2016/SVG/main" r:embed="rId8"/>
-                </a:ext>
-              </a:extLst>
-            </a:blip>
-            <a:stretch>
-              <a:fillRect/>
-            </a:stretch>
-          </p:blipFill>
-          <p:spPr>
-            <a:xfrm>
-              <a:off x="9666392" y="448013"/>
-              <a:ext cx="1594530" cy="1594530"/>
-            </a:xfrm>
-            <a:prstGeom prst="rect">
-              <a:avLst/>
-            </a:prstGeom>
-          </p:spPr>
-        </p:pic>
-        <p:pic>
-          <p:nvPicPr>
-            <p:cNvPr id="17" name="Picture 16" descr="A black background with white text&#10;&#10;Description automatically generated">
-              <a:extLst>
-                <a:ext uri="{FF2B5EF4-FFF2-40B4-BE49-F238E27FC236}">
-                  <a16:creationId xmlns:a16="http://schemas.microsoft.com/office/drawing/2014/main" id="{52B84E6F-0E13-18DB-E39B-681463107168}"/>
-                </a:ext>
-              </a:extLst>
-            </p:cNvPr>
-            <p:cNvPicPr>
-              <a:picLocks noChangeAspect="1"/>
-            </p:cNvPicPr>
-            <p:nvPr/>
-          </p:nvPicPr>
-          <p:blipFill>
-            <a:blip r:embed="rId9">
-              <a:extLst>
-                <a:ext uri="{28A0092B-C50C-407E-A947-70E740481C1C}">
-                  <a14:useLocalDpi xmlns:a14="http://schemas.microsoft.com/office/drawing/2010/main" val="0"/>
-                </a:ext>
-              </a:extLst>
-            </a:blip>
-            <a:stretch>
-              <a:fillRect/>
-            </a:stretch>
-          </p:blipFill>
-          <p:spPr>
-            <a:xfrm>
-              <a:off x="701058" y="2902126"/>
-              <a:ext cx="1803098" cy="629042"/>
-            </a:xfrm>
-            <a:prstGeom prst="rect">
-              <a:avLst/>
-            </a:prstGeom>
-          </p:spPr>
-        </p:pic>
-        <p:pic>
-          <p:nvPicPr>
-            <p:cNvPr id="3" name="Graphic 2">
-              <a:extLst>
-                <a:ext uri="{FF2B5EF4-FFF2-40B4-BE49-F238E27FC236}">
-                  <a16:creationId xmlns:a16="http://schemas.microsoft.com/office/drawing/2014/main" id="{72C8C48E-9767-B314-C55D-E66F669E5571}"/>
-                </a:ext>
-              </a:extLst>
-            </p:cNvPr>
-            <p:cNvPicPr>
-              <a:picLocks noChangeAspect="1"/>
-            </p:cNvPicPr>
-            <p:nvPr/>
-          </p:nvPicPr>
-          <p:blipFill>
-            <a:blip r:embed="rId10">
-              <a:extLst>
-                <a:ext uri="{28A0092B-C50C-407E-A947-70E740481C1C}">
-                  <a14:useLocalDpi xmlns:a14="http://schemas.microsoft.com/office/drawing/2010/main" val="0"/>
-                </a:ext>
-                <a:ext uri="{96DAC541-7B7A-43D3-8B79-37D633B846F1}">
-                  <asvg:svgBlip xmlns:asvg="http://schemas.microsoft.com/office/drawing/2016/SVG/main" r:embed="rId11"/>
-                </a:ext>
-              </a:extLst>
-            </a:blip>
-            <a:stretch>
-              <a:fillRect/>
-            </a:stretch>
-          </p:blipFill>
-          <p:spPr>
-            <a:xfrm>
-              <a:off x="5128677" y="999877"/>
-              <a:ext cx="2149381" cy="490805"/>
-            </a:xfrm>
-            <a:prstGeom prst="rect">
-              <a:avLst/>
-            </a:prstGeom>
-          </p:spPr>
-        </p:pic>
-        <p:pic>
-          <p:nvPicPr>
-            <p:cNvPr id="5" name="Picture 4" descr="A group of colorful cubes&#10;&#10;Description automatically generated">
-              <a:extLst>
-                <a:ext uri="{FF2B5EF4-FFF2-40B4-BE49-F238E27FC236}">
-                  <a16:creationId xmlns:a16="http://schemas.microsoft.com/office/drawing/2014/main" id="{47D8CA7D-484F-D1EB-66BC-8826348E4305}"/>
-                </a:ext>
-              </a:extLst>
-            </p:cNvPr>
-            <p:cNvPicPr>
-              <a:picLocks noChangeAspect="1"/>
-            </p:cNvPicPr>
-            <p:nvPr/>
-          </p:nvPicPr>
-          <p:blipFill>
-            <a:blip r:embed="rId12">
-              <a:extLst>
-                <a:ext uri="{28A0092B-C50C-407E-A947-70E740481C1C}">
-                  <a14:useLocalDpi xmlns:a14="http://schemas.microsoft.com/office/drawing/2010/main" val="0"/>
-                </a:ext>
-              </a:extLst>
-            </a:blip>
-            <a:stretch>
-              <a:fillRect/>
-            </a:stretch>
-          </p:blipFill>
-          <p:spPr>
-            <a:xfrm>
-              <a:off x="7961927" y="2455033"/>
-              <a:ext cx="1523235" cy="1523235"/>
-            </a:xfrm>
-            <a:prstGeom prst="rect">
-              <a:avLst/>
-            </a:prstGeom>
-          </p:spPr>
-        </p:pic>
-        <p:pic>
-          <p:nvPicPr>
-            <p:cNvPr id="8" name="Picture 7" descr="A green and white logo&#10;&#10;Description automatically generated">
-              <a:extLst>
-                <a:ext uri="{FF2B5EF4-FFF2-40B4-BE49-F238E27FC236}">
-                  <a16:creationId xmlns:a16="http://schemas.microsoft.com/office/drawing/2014/main" id="{5BD68DA0-F98C-BAC6-62A2-B022AA2F0020}"/>
-                </a:ext>
-              </a:extLst>
-            </p:cNvPr>
-            <p:cNvPicPr>
-              <a:picLocks noChangeAspect="1"/>
-            </p:cNvPicPr>
-            <p:nvPr/>
-          </p:nvPicPr>
-          <p:blipFill>
-            <a:blip r:embed="rId13">
-              <a:extLst>
-                <a:ext uri="{28A0092B-C50C-407E-A947-70E740481C1C}">
-                  <a14:useLocalDpi xmlns:a14="http://schemas.microsoft.com/office/drawing/2010/main" val="0"/>
-                </a:ext>
-              </a:extLst>
-            </a:blip>
-            <a:stretch>
-              <a:fillRect/>
-            </a:stretch>
-          </p:blipFill>
-          <p:spPr>
-            <a:xfrm>
-              <a:off x="5338321" y="2635993"/>
-              <a:ext cx="2164258" cy="1161309"/>
-            </a:xfrm>
-            <a:prstGeom prst="rect">
-              <a:avLst/>
-            </a:prstGeom>
-          </p:spPr>
-        </p:pic>
-        <p:pic>
-          <p:nvPicPr>
-            <p:cNvPr id="12" name="Graphic 11">
-              <a:extLst>
-                <a:ext uri="{FF2B5EF4-FFF2-40B4-BE49-F238E27FC236}">
-                  <a16:creationId xmlns:a16="http://schemas.microsoft.com/office/drawing/2014/main" id="{4909E08B-D328-8858-D6CD-7A82F8BEC3B1}"/>
-                </a:ext>
-              </a:extLst>
-            </p:cNvPr>
-            <p:cNvPicPr>
-              <a:picLocks noChangeAspect="1"/>
-            </p:cNvPicPr>
-            <p:nvPr/>
-          </p:nvPicPr>
-          <p:blipFill>
-            <a:blip r:embed="rId14">
-              <a:extLst>
-                <a:ext uri="{28A0092B-C50C-407E-A947-70E740481C1C}">
-                  <a14:useLocalDpi xmlns:a14="http://schemas.microsoft.com/office/drawing/2010/main" val="0"/>
-                </a:ext>
-                <a:ext uri="{96DAC541-7B7A-43D3-8B79-37D633B846F1}">
-                  <asvg:svgBlip xmlns:asvg="http://schemas.microsoft.com/office/drawing/2016/SVG/main" r:embed="rId15"/>
-                </a:ext>
-              </a:extLst>
-            </a:blip>
-            <a:stretch>
-              <a:fillRect/>
-            </a:stretch>
-          </p:blipFill>
-          <p:spPr>
-            <a:xfrm>
-              <a:off x="790465" y="4392588"/>
-              <a:ext cx="1897260" cy="1027396"/>
-            </a:xfrm>
-            <a:prstGeom prst="rect">
-              <a:avLst/>
-            </a:prstGeom>
-          </p:spPr>
-        </p:pic>
-        <p:pic>
-          <p:nvPicPr>
-            <p:cNvPr id="16" name="Graphic 15">
-              <a:extLst>
-                <a:ext uri="{FF2B5EF4-FFF2-40B4-BE49-F238E27FC236}">
-                  <a16:creationId xmlns:a16="http://schemas.microsoft.com/office/drawing/2014/main" id="{099B1202-7BC3-919D-F48A-DDA449B1E178}"/>
-                </a:ext>
-              </a:extLst>
-            </p:cNvPr>
-            <p:cNvPicPr>
-              <a:picLocks noChangeAspect="1"/>
-            </p:cNvPicPr>
-            <p:nvPr/>
-          </p:nvPicPr>
-          <p:blipFill>
-            <a:blip r:embed="rId16">
-              <a:extLst>
-                <a:ext uri="{28A0092B-C50C-407E-A947-70E740481C1C}">
-                  <a14:useLocalDpi xmlns:a14="http://schemas.microsoft.com/office/drawing/2010/main" val="0"/>
-                </a:ext>
-                <a:ext uri="{96DAC541-7B7A-43D3-8B79-37D633B846F1}">
-                  <asvg:svgBlip xmlns:asvg="http://schemas.microsoft.com/office/drawing/2016/SVG/main" r:embed="rId17"/>
-                </a:ext>
-              </a:extLst>
-            </a:blip>
-            <a:stretch>
-              <a:fillRect/>
-            </a:stretch>
-          </p:blipFill>
-          <p:spPr>
-            <a:xfrm>
-              <a:off x="5787676" y="4397264"/>
-              <a:ext cx="2261626" cy="1018045"/>
-            </a:xfrm>
-            <a:prstGeom prst="rect">
-              <a:avLst/>
-            </a:prstGeom>
-          </p:spPr>
-        </p:pic>
-        <p:pic>
-          <p:nvPicPr>
-            <p:cNvPr id="19" name="Graphic 18">
-              <a:extLst>
-                <a:ext uri="{FF2B5EF4-FFF2-40B4-BE49-F238E27FC236}">
-                  <a16:creationId xmlns:a16="http://schemas.microsoft.com/office/drawing/2014/main" id="{03EE0392-9EE5-653D-AFA0-19B4F2BB058F}"/>
-                </a:ext>
-              </a:extLst>
-            </p:cNvPr>
-            <p:cNvPicPr>
-              <a:picLocks noChangeAspect="1"/>
-            </p:cNvPicPr>
-            <p:nvPr/>
-          </p:nvPicPr>
-          <p:blipFill>
-            <a:blip r:embed="rId18">
-              <a:extLst>
-                <a:ext uri="{28A0092B-C50C-407E-A947-70E740481C1C}">
-                  <a14:useLocalDpi xmlns:a14="http://schemas.microsoft.com/office/drawing/2010/main" val="0"/>
-                </a:ext>
-                <a:ext uri="{96DAC541-7B7A-43D3-8B79-37D633B846F1}">
-                  <asvg:svgBlip xmlns:asvg="http://schemas.microsoft.com/office/drawing/2016/SVG/main" r:embed="rId19"/>
-                </a:ext>
-              </a:extLst>
-            </a:blip>
-            <a:stretch>
-              <a:fillRect/>
-            </a:stretch>
-          </p:blipFill>
-          <p:spPr>
-            <a:xfrm>
-              <a:off x="3099063" y="4446103"/>
-              <a:ext cx="2277281" cy="920366"/>
-            </a:xfrm>
-            <a:prstGeom prst="rect">
-              <a:avLst/>
-            </a:prstGeom>
-          </p:spPr>
-        </p:pic>
-        <p:pic>
-          <p:nvPicPr>
-            <p:cNvPr id="21" name="Graphic 20">
-              <a:extLst>
-                <a:ext uri="{FF2B5EF4-FFF2-40B4-BE49-F238E27FC236}">
-                  <a16:creationId xmlns:a16="http://schemas.microsoft.com/office/drawing/2014/main" id="{EAC7CCC6-4A25-B84A-4095-2FFB38B44781}"/>
-                </a:ext>
-              </a:extLst>
-            </p:cNvPr>
-            <p:cNvPicPr>
-              <a:picLocks noChangeAspect="1"/>
-            </p:cNvPicPr>
-            <p:nvPr/>
-          </p:nvPicPr>
-          <p:blipFill rotWithShape="1">
-            <a:blip r:embed="rId20">
-              <a:extLst>
-                <a:ext uri="{28A0092B-C50C-407E-A947-70E740481C1C}">
-                  <a14:useLocalDpi xmlns:a14="http://schemas.microsoft.com/office/drawing/2010/main" val="0"/>
-                </a:ext>
-                <a:ext uri="{96DAC541-7B7A-43D3-8B79-37D633B846F1}">
-                  <asvg:svgBlip xmlns:asvg="http://schemas.microsoft.com/office/drawing/2016/SVG/main" r:embed="rId21"/>
-                </a:ext>
-              </a:extLst>
-            </a:blip>
-            <a:srcRect t="34391" b="32841"/>
-            <a:stretch/>
-          </p:blipFill>
-          <p:spPr>
-            <a:xfrm>
-              <a:off x="8460643" y="4535737"/>
-              <a:ext cx="2261627" cy="741098"/>
-            </a:xfrm>
-            <a:prstGeom prst="rect">
-              <a:avLst/>
-            </a:prstGeom>
-          </p:spPr>
-        </p:pic>
-        <p:pic>
-          <p:nvPicPr>
-            <p:cNvPr id="23" name="Picture 22" descr="A yellow and grey logo&#10;&#10;Description automatically generated">
-              <a:extLst>
-                <a:ext uri="{FF2B5EF4-FFF2-40B4-BE49-F238E27FC236}">
-                  <a16:creationId xmlns:a16="http://schemas.microsoft.com/office/drawing/2014/main" id="{FC9B8F13-FA40-24DF-A957-8AE8E7C08C81}"/>
-                </a:ext>
-              </a:extLst>
-            </p:cNvPr>
-            <p:cNvPicPr>
-              <a:picLocks noChangeAspect="1"/>
-            </p:cNvPicPr>
-            <p:nvPr/>
-          </p:nvPicPr>
-          <p:blipFill>
-            <a:blip r:embed="rId22">
-              <a:extLst>
-                <a:ext uri="{28A0092B-C50C-407E-A947-70E740481C1C}">
-                  <a14:useLocalDpi xmlns:a14="http://schemas.microsoft.com/office/drawing/2010/main" val="0"/>
-                </a:ext>
-              </a:extLst>
-            </a:blip>
-            <a:stretch>
-              <a:fillRect/>
-            </a:stretch>
-          </p:blipFill>
-          <p:spPr>
-            <a:xfrm>
-              <a:off x="9944500" y="2679303"/>
-              <a:ext cx="2059514" cy="1158477"/>
-            </a:xfrm>
-            <a:prstGeom prst="rect">
-              <a:avLst/>
-            </a:prstGeom>
-          </p:spPr>
-        </p:pic>
-        <p:pic>
-          <p:nvPicPr>
-            <p:cNvPr id="25" name="Picture 24" descr="A logo of a cloud platform&#10;&#10;Description automatically generated">
-              <a:extLst>
-                <a:ext uri="{FF2B5EF4-FFF2-40B4-BE49-F238E27FC236}">
-                  <a16:creationId xmlns:a16="http://schemas.microsoft.com/office/drawing/2014/main" id="{7C070CE0-D16F-78F5-7A9D-9D1DF75BDCC7}"/>
-                </a:ext>
-              </a:extLst>
-            </p:cNvPr>
-            <p:cNvPicPr>
-              <a:picLocks noChangeAspect="1"/>
-            </p:cNvPicPr>
-            <p:nvPr/>
-          </p:nvPicPr>
-          <p:blipFill rotWithShape="1">
-            <a:blip r:embed="rId23">
-              <a:extLst>
-                <a:ext uri="{28A0092B-C50C-407E-A947-70E740481C1C}">
-                  <a14:useLocalDpi xmlns:a14="http://schemas.microsoft.com/office/drawing/2010/main" val="0"/>
-                </a:ext>
-              </a:extLst>
-            </a:blip>
-            <a:srcRect l="5547" r="5588"/>
-            <a:stretch/>
-          </p:blipFill>
-          <p:spPr>
-            <a:xfrm>
-              <a:off x="11647556" y="583643"/>
-              <a:ext cx="2192383" cy="1522651"/>
-            </a:xfrm>
-            <a:prstGeom prst="rect">
-              <a:avLst/>
-            </a:prstGeom>
-          </p:spPr>
-        </p:pic>
-        <p:pic>
-          <p:nvPicPr>
-            <p:cNvPr id="27" name="Graphic 26">
-              <a:extLst>
-                <a:ext uri="{FF2B5EF4-FFF2-40B4-BE49-F238E27FC236}">
-                  <a16:creationId xmlns:a16="http://schemas.microsoft.com/office/drawing/2014/main" id="{2BCEF89E-34F6-F1B2-C05A-30396396998B}"/>
-                </a:ext>
-              </a:extLst>
-            </p:cNvPr>
-            <p:cNvPicPr>
-              <a:picLocks noChangeAspect="1"/>
-            </p:cNvPicPr>
-            <p:nvPr/>
-          </p:nvPicPr>
-          <p:blipFill>
-            <a:blip r:embed="rId24">
-              <a:extLst>
-                <a:ext uri="{28A0092B-C50C-407E-A947-70E740481C1C}">
-                  <a14:useLocalDpi xmlns:a14="http://schemas.microsoft.com/office/drawing/2010/main" val="0"/>
-                </a:ext>
-                <a:ext uri="{96DAC541-7B7A-43D3-8B79-37D633B846F1}">
-                  <asvg:svgBlip xmlns:asvg="http://schemas.microsoft.com/office/drawing/2016/SVG/main" r:embed="rId25"/>
-                </a:ext>
-              </a:extLst>
-            </a:blip>
-            <a:stretch>
-              <a:fillRect/>
-            </a:stretch>
-          </p:blipFill>
-          <p:spPr>
-            <a:xfrm>
-              <a:off x="12463361" y="2455033"/>
-              <a:ext cx="1282204" cy="1538644"/>
-            </a:xfrm>
-            <a:prstGeom prst="rect">
-              <a:avLst/>
-            </a:prstGeom>
-          </p:spPr>
-        </p:pic>
-        <p:pic>
-          <p:nvPicPr>
-            <p:cNvPr id="31" name="Graphic 30">
-              <a:extLst>
-                <a:ext uri="{FF2B5EF4-FFF2-40B4-BE49-F238E27FC236}">
-                  <a16:creationId xmlns:a16="http://schemas.microsoft.com/office/drawing/2014/main" id="{3CA2B5FC-3326-CD57-C0F4-A98FD6B1008D}"/>
-                </a:ext>
-              </a:extLst>
-            </p:cNvPr>
-            <p:cNvPicPr>
-              <a:picLocks noChangeAspect="1"/>
-            </p:cNvPicPr>
-            <p:nvPr/>
-          </p:nvPicPr>
-          <p:blipFill>
-            <a:blip r:embed="rId26">
-              <a:extLst>
-                <a:ext uri="{28A0092B-C50C-407E-A947-70E740481C1C}">
-                  <a14:useLocalDpi xmlns:a14="http://schemas.microsoft.com/office/drawing/2010/main" val="0"/>
-                </a:ext>
-                <a:ext uri="{96DAC541-7B7A-43D3-8B79-37D633B846F1}">
-                  <asvg:svgBlip xmlns:asvg="http://schemas.microsoft.com/office/drawing/2016/SVG/main" r:embed="rId27"/>
-                </a:ext>
-              </a:extLst>
-            </a:blip>
-            <a:stretch>
-              <a:fillRect/>
-            </a:stretch>
-          </p:blipFill>
-          <p:spPr>
-            <a:xfrm>
-              <a:off x="2735574" y="2679305"/>
-              <a:ext cx="2149380" cy="1074692"/>
-            </a:xfrm>
-            <a:prstGeom prst="rect">
-              <a:avLst/>
-            </a:prstGeom>
-          </p:spPr>
-        </p:pic>
-        <p:pic>
-          <p:nvPicPr>
-            <p:cNvPr id="39" name="Graphic 38">
-              <a:extLst>
-                <a:ext uri="{FF2B5EF4-FFF2-40B4-BE49-F238E27FC236}">
-                  <a16:creationId xmlns:a16="http://schemas.microsoft.com/office/drawing/2014/main" id="{31D04942-1987-DC77-0642-4D8380B6EB55}"/>
-                </a:ext>
-              </a:extLst>
-            </p:cNvPr>
-            <p:cNvPicPr>
-              <a:picLocks noChangeAspect="1"/>
-            </p:cNvPicPr>
-            <p:nvPr/>
-          </p:nvPicPr>
-          <p:blipFill rotWithShape="1">
-            <a:blip r:embed="rId28">
-              <a:extLst>
-                <a:ext uri="{28A0092B-C50C-407E-A947-70E740481C1C}">
-                  <a14:useLocalDpi xmlns:a14="http://schemas.microsoft.com/office/drawing/2010/main" val="0"/>
-                </a:ext>
-                <a:ext uri="{96DAC541-7B7A-43D3-8B79-37D633B846F1}">
-                  <asvg:svgBlip xmlns:asvg="http://schemas.microsoft.com/office/drawing/2016/SVG/main" r:embed="rId29"/>
-                </a:ext>
-              </a:extLst>
-            </a:blip>
-            <a:srcRect t="33292" b="32307"/>
-            <a:stretch/>
-          </p:blipFill>
-          <p:spPr>
-            <a:xfrm>
-              <a:off x="11133601" y="4451999"/>
-              <a:ext cx="2641140" cy="908575"/>
-            </a:xfrm>
-            <a:prstGeom prst="rect">
-              <a:avLst/>
-            </a:prstGeom>
-          </p:spPr>
-        </p:pic>
-      </p:grpSp>
+        </p:nvPicPr>
+        <p:blipFill>
+          <a:blip r:embed="rId2">
+            <a:extLst>
+              <a:ext uri="{28A0092B-C50C-407E-A947-70E740481C1C}">
+                <a14:useLocalDpi xmlns:a14="http://schemas.microsoft.com/office/drawing/2010/main" val="0"/>
+              </a:ext>
+              <a:ext uri="{96DAC541-7B7A-43D3-8B79-37D633B846F1}">
+                <asvg:svgBlip xmlns:asvg="http://schemas.microsoft.com/office/drawing/2016/SVG/main" r:embed="rId3"/>
+              </a:ext>
+            </a:extLst>
+          </a:blip>
+          <a:stretch>
+            <a:fillRect/>
+          </a:stretch>
+        </p:blipFill>
+        <p:spPr>
+          <a:xfrm>
+            <a:off x="7499774" y="4509354"/>
+            <a:ext cx="1371847" cy="1363186"/>
+          </a:xfrm>
+          <a:prstGeom prst="rect">
+            <a:avLst/>
+          </a:prstGeom>
+        </p:spPr>
+      </p:pic>
+      <p:pic>
+        <p:nvPicPr>
+          <p:cNvPr id="13" name="Graphic 12">
+            <a:extLst>
+              <a:ext uri="{FF2B5EF4-FFF2-40B4-BE49-F238E27FC236}">
+                <a16:creationId xmlns:a16="http://schemas.microsoft.com/office/drawing/2014/main" id="{9DFDBC77-46F7-E0BC-BAAC-9FC384A71983}"/>
+              </a:ext>
+            </a:extLst>
+          </p:cNvPr>
+          <p:cNvPicPr>
+            <a:picLocks noChangeAspect="1"/>
+          </p:cNvPicPr>
+          <p:nvPr/>
+        </p:nvPicPr>
+        <p:blipFill>
+          <a:blip r:embed="rId4">
+            <a:extLst>
+              <a:ext uri="{28A0092B-C50C-407E-A947-70E740481C1C}">
+                <a14:useLocalDpi xmlns:a14="http://schemas.microsoft.com/office/drawing/2010/main" val="0"/>
+              </a:ext>
+              <a:ext uri="{96DAC541-7B7A-43D3-8B79-37D633B846F1}">
+                <asvg:svgBlip xmlns:asvg="http://schemas.microsoft.com/office/drawing/2016/SVG/main" r:embed="rId5"/>
+              </a:ext>
+            </a:extLst>
+          </a:blip>
+          <a:stretch>
+            <a:fillRect/>
+          </a:stretch>
+        </p:blipFill>
+        <p:spPr>
+          <a:xfrm>
+            <a:off x="7583554" y="450002"/>
+            <a:ext cx="1250586" cy="1242691"/>
+          </a:xfrm>
+          <a:prstGeom prst="rect">
+            <a:avLst/>
+          </a:prstGeom>
+        </p:spPr>
+      </p:pic>
+      <p:pic>
+        <p:nvPicPr>
+          <p:cNvPr id="17" name="Picture 16" descr="A black background with white text&#10;&#10;Description automatically generated">
+            <a:extLst>
+              <a:ext uri="{FF2B5EF4-FFF2-40B4-BE49-F238E27FC236}">
+                <a16:creationId xmlns:a16="http://schemas.microsoft.com/office/drawing/2014/main" id="{52B84E6F-0E13-18DB-E39B-681463107168}"/>
+              </a:ext>
+            </a:extLst>
+          </p:cNvPr>
+          <p:cNvPicPr>
+            <a:picLocks noChangeAspect="1"/>
+          </p:cNvPicPr>
+          <p:nvPr/>
+        </p:nvPicPr>
+        <p:blipFill>
+          <a:blip r:embed="rId6">
+            <a:extLst>
+              <a:ext uri="{28A0092B-C50C-407E-A947-70E740481C1C}">
+                <a14:useLocalDpi xmlns:a14="http://schemas.microsoft.com/office/drawing/2010/main" val="0"/>
+              </a:ext>
+            </a:extLst>
+          </a:blip>
+          <a:stretch>
+            <a:fillRect/>
+          </a:stretch>
+        </p:blipFill>
+        <p:spPr>
+          <a:xfrm>
+            <a:off x="12066610" y="696855"/>
+            <a:ext cx="2160539" cy="748984"/>
+          </a:xfrm>
+          <a:prstGeom prst="rect">
+            <a:avLst/>
+          </a:prstGeom>
+        </p:spPr>
+      </p:pic>
+      <p:pic>
+        <p:nvPicPr>
+          <p:cNvPr id="5" name="Picture 4" descr="A group of colorful cubes&#10;&#10;Description automatically generated">
+            <a:extLst>
+              <a:ext uri="{FF2B5EF4-FFF2-40B4-BE49-F238E27FC236}">
+                <a16:creationId xmlns:a16="http://schemas.microsoft.com/office/drawing/2014/main" id="{47D8CA7D-484F-D1EB-66BC-8826348E4305}"/>
+              </a:ext>
+            </a:extLst>
+          </p:cNvPr>
+          <p:cNvPicPr>
+            <a:picLocks noChangeAspect="1"/>
+          </p:cNvPicPr>
+          <p:nvPr/>
+        </p:nvPicPr>
+        <p:blipFill>
+          <a:blip r:embed="rId7">
+            <a:extLst>
+              <a:ext uri="{28A0092B-C50C-407E-A947-70E740481C1C}">
+                <a14:useLocalDpi xmlns:a14="http://schemas.microsoft.com/office/drawing/2010/main" val="0"/>
+              </a:ext>
+            </a:extLst>
+          </a:blip>
+          <a:stretch>
+            <a:fillRect/>
+          </a:stretch>
+        </p:blipFill>
+        <p:spPr>
+          <a:xfrm>
+            <a:off x="5169344" y="450002"/>
+            <a:ext cx="1250586" cy="1242691"/>
+          </a:xfrm>
+          <a:prstGeom prst="rect">
+            <a:avLst/>
+          </a:prstGeom>
+        </p:spPr>
+      </p:pic>
+      <p:pic>
+        <p:nvPicPr>
+          <p:cNvPr id="8" name="Picture 7" descr="A green and white logo&#10;&#10;Description automatically generated">
+            <a:extLst>
+              <a:ext uri="{FF2B5EF4-FFF2-40B4-BE49-F238E27FC236}">
+                <a16:creationId xmlns:a16="http://schemas.microsoft.com/office/drawing/2014/main" id="{5BD68DA0-F98C-BAC6-62A2-B022AA2F0020}"/>
+              </a:ext>
+            </a:extLst>
+          </p:cNvPr>
+          <p:cNvPicPr>
+            <a:picLocks noChangeAspect="1"/>
+          </p:cNvPicPr>
+          <p:nvPr/>
+        </p:nvPicPr>
+        <p:blipFill>
+          <a:blip r:embed="rId8">
+            <a:extLst>
+              <a:ext uri="{28A0092B-C50C-407E-A947-70E740481C1C}">
+                <a14:useLocalDpi xmlns:a14="http://schemas.microsoft.com/office/drawing/2010/main" val="0"/>
+              </a:ext>
+            </a:extLst>
+          </a:blip>
+          <a:stretch>
+            <a:fillRect/>
+          </a:stretch>
+        </p:blipFill>
+        <p:spPr>
+          <a:xfrm>
+            <a:off x="2532028" y="605344"/>
+            <a:ext cx="1747954" cy="932006"/>
+          </a:xfrm>
+          <a:prstGeom prst="rect">
+            <a:avLst/>
+          </a:prstGeom>
+        </p:spPr>
+      </p:pic>
+      <p:pic>
+        <p:nvPicPr>
+          <p:cNvPr id="12" name="Graphic 11">
+            <a:extLst>
+              <a:ext uri="{FF2B5EF4-FFF2-40B4-BE49-F238E27FC236}">
+                <a16:creationId xmlns:a16="http://schemas.microsoft.com/office/drawing/2014/main" id="{4909E08B-D328-8858-D6CD-7A82F8BEC3B1}"/>
+              </a:ext>
+            </a:extLst>
+          </p:cNvPr>
+          <p:cNvPicPr>
+            <a:picLocks noChangeAspect="1"/>
+          </p:cNvPicPr>
+          <p:nvPr/>
+        </p:nvPicPr>
+        <p:blipFill>
+          <a:blip r:embed="rId9">
+            <a:extLst>
+              <a:ext uri="{28A0092B-C50C-407E-A947-70E740481C1C}">
+                <a14:useLocalDpi xmlns:a14="http://schemas.microsoft.com/office/drawing/2010/main" val="0"/>
+              </a:ext>
+              <a:ext uri="{96DAC541-7B7A-43D3-8B79-37D633B846F1}">
+                <asvg:svgBlip xmlns:asvg="http://schemas.microsoft.com/office/drawing/2016/SVG/main" r:embed="rId10"/>
+              </a:ext>
+            </a:extLst>
+          </a:blip>
+          <a:stretch>
+            <a:fillRect/>
+          </a:stretch>
+        </p:blipFill>
+        <p:spPr>
+          <a:xfrm>
+            <a:off x="9799358" y="2667729"/>
+            <a:ext cx="1597044" cy="859365"/>
+          </a:xfrm>
+          <a:prstGeom prst="rect">
+            <a:avLst/>
+          </a:prstGeom>
+        </p:spPr>
+      </p:pic>
+      <p:pic>
+        <p:nvPicPr>
+          <p:cNvPr id="16" name="Graphic 15">
+            <a:extLst>
+              <a:ext uri="{FF2B5EF4-FFF2-40B4-BE49-F238E27FC236}">
+                <a16:creationId xmlns:a16="http://schemas.microsoft.com/office/drawing/2014/main" id="{099B1202-7BC3-919D-F48A-DDA449B1E178}"/>
+              </a:ext>
+            </a:extLst>
+          </p:cNvPr>
+          <p:cNvPicPr>
+            <a:picLocks noChangeAspect="1"/>
+          </p:cNvPicPr>
+          <p:nvPr/>
+        </p:nvPicPr>
+        <p:blipFill>
+          <a:blip r:embed="rId11">
+            <a:extLst>
+              <a:ext uri="{28A0092B-C50C-407E-A947-70E740481C1C}">
+                <a14:useLocalDpi xmlns:a14="http://schemas.microsoft.com/office/drawing/2010/main" val="0"/>
+              </a:ext>
+              <a:ext uri="{96DAC541-7B7A-43D3-8B79-37D633B846F1}">
+                <asvg:svgBlip xmlns:asvg="http://schemas.microsoft.com/office/drawing/2016/SVG/main" r:embed="rId12"/>
+              </a:ext>
+            </a:extLst>
+          </a:blip>
+          <a:stretch>
+            <a:fillRect/>
+          </a:stretch>
+        </p:blipFill>
+        <p:spPr>
+          <a:xfrm>
+            <a:off x="7192419" y="2642766"/>
+            <a:ext cx="2032857" cy="909291"/>
+          </a:xfrm>
+          <a:prstGeom prst="rect">
+            <a:avLst/>
+          </a:prstGeom>
+        </p:spPr>
+      </p:pic>
+      <p:pic>
+        <p:nvPicPr>
+          <p:cNvPr id="19" name="Graphic 18">
+            <a:extLst>
+              <a:ext uri="{FF2B5EF4-FFF2-40B4-BE49-F238E27FC236}">
+                <a16:creationId xmlns:a16="http://schemas.microsoft.com/office/drawing/2014/main" id="{03EE0392-9EE5-653D-AFA0-19B4F2BB058F}"/>
+              </a:ext>
+            </a:extLst>
+          </p:cNvPr>
+          <p:cNvPicPr>
+            <a:picLocks noChangeAspect="1"/>
+          </p:cNvPicPr>
+          <p:nvPr/>
+        </p:nvPicPr>
+        <p:blipFill>
+          <a:blip r:embed="rId13">
+            <a:extLst>
+              <a:ext uri="{28A0092B-C50C-407E-A947-70E740481C1C}">
+                <a14:useLocalDpi xmlns:a14="http://schemas.microsoft.com/office/drawing/2010/main" val="0"/>
+              </a:ext>
+              <a:ext uri="{96DAC541-7B7A-43D3-8B79-37D633B846F1}">
+                <asvg:svgBlip xmlns:asvg="http://schemas.microsoft.com/office/drawing/2016/SVG/main" r:embed="rId14"/>
+              </a:ext>
+            </a:extLst>
+          </a:blip>
+          <a:stretch>
+            <a:fillRect/>
+          </a:stretch>
+        </p:blipFill>
+        <p:spPr>
+          <a:xfrm>
+            <a:off x="4771173" y="2686388"/>
+            <a:ext cx="2046929" cy="822046"/>
+          </a:xfrm>
+          <a:prstGeom prst="rect">
+            <a:avLst/>
+          </a:prstGeom>
+        </p:spPr>
+      </p:pic>
+      <p:pic>
+        <p:nvPicPr>
+          <p:cNvPr id="23" name="Picture 22" descr="A yellow and grey logo&#10;&#10;Description automatically generated">
+            <a:extLst>
+              <a:ext uri="{FF2B5EF4-FFF2-40B4-BE49-F238E27FC236}">
+                <a16:creationId xmlns:a16="http://schemas.microsoft.com/office/drawing/2014/main" id="{FC9B8F13-FA40-24DF-A957-8AE8E7C08C81}"/>
+              </a:ext>
+            </a:extLst>
+          </p:cNvPr>
+          <p:cNvPicPr>
+            <a:picLocks noChangeAspect="1"/>
+          </p:cNvPicPr>
+          <p:nvPr/>
+        </p:nvPicPr>
+        <p:blipFill>
+          <a:blip r:embed="rId15">
+            <a:extLst>
+              <a:ext uri="{28A0092B-C50C-407E-A947-70E740481C1C}">
+                <a14:useLocalDpi xmlns:a14="http://schemas.microsoft.com/office/drawing/2010/main" val="0"/>
+              </a:ext>
+            </a:extLst>
+          </a:blip>
+          <a:stretch>
+            <a:fillRect/>
+          </a:stretch>
+        </p:blipFill>
+        <p:spPr>
+          <a:xfrm>
+            <a:off x="2553331" y="2620809"/>
+            <a:ext cx="1705349" cy="953204"/>
+          </a:xfrm>
+          <a:prstGeom prst="rect">
+            <a:avLst/>
+          </a:prstGeom>
+        </p:spPr>
+      </p:pic>
+      <p:pic>
+        <p:nvPicPr>
+          <p:cNvPr id="25" name="Picture 24" descr="A logo of a cloud platform&#10;&#10;Description automatically generated">
+            <a:extLst>
+              <a:ext uri="{FF2B5EF4-FFF2-40B4-BE49-F238E27FC236}">
+                <a16:creationId xmlns:a16="http://schemas.microsoft.com/office/drawing/2014/main" id="{7C070CE0-D16F-78F5-7A9D-9D1DF75BDCC7}"/>
+              </a:ext>
+            </a:extLst>
+          </p:cNvPr>
+          <p:cNvPicPr>
+            <a:picLocks noChangeAspect="1"/>
+          </p:cNvPicPr>
+          <p:nvPr/>
+        </p:nvPicPr>
+        <p:blipFill rotWithShape="1">
+          <a:blip r:embed="rId16">
+            <a:extLst>
+              <a:ext uri="{28A0092B-C50C-407E-A947-70E740481C1C}">
+                <a14:useLocalDpi xmlns:a14="http://schemas.microsoft.com/office/drawing/2010/main" val="0"/>
+              </a:ext>
+            </a:extLst>
+          </a:blip>
+          <a:srcRect l="5547" r="5588"/>
+          <a:stretch/>
+        </p:blipFill>
+        <p:spPr>
+          <a:xfrm>
+            <a:off x="238388" y="4598791"/>
+            <a:ext cx="1716061" cy="1184313"/>
+          </a:xfrm>
+          <a:prstGeom prst="rect">
+            <a:avLst/>
+          </a:prstGeom>
+        </p:spPr>
+      </p:pic>
+      <p:pic>
+        <p:nvPicPr>
+          <p:cNvPr id="27" name="Graphic 26">
+            <a:extLst>
+              <a:ext uri="{FF2B5EF4-FFF2-40B4-BE49-F238E27FC236}">
+                <a16:creationId xmlns:a16="http://schemas.microsoft.com/office/drawing/2014/main" id="{2BCEF89E-34F6-F1B2-C05A-30396396998B}"/>
+              </a:ext>
+            </a:extLst>
+          </p:cNvPr>
+          <p:cNvPicPr>
+            <a:picLocks noChangeAspect="1"/>
+          </p:cNvPicPr>
+          <p:nvPr/>
+        </p:nvPicPr>
+        <p:blipFill>
+          <a:blip r:embed="rId17">
+            <a:extLst>
+              <a:ext uri="{28A0092B-C50C-407E-A947-70E740481C1C}">
+                <a14:useLocalDpi xmlns:a14="http://schemas.microsoft.com/office/drawing/2010/main" val="0"/>
+              </a:ext>
+              <a:ext uri="{96DAC541-7B7A-43D3-8B79-37D633B846F1}">
+                <asvg:svgBlip xmlns:asvg="http://schemas.microsoft.com/office/drawing/2016/SVG/main" r:embed="rId18"/>
+              </a:ext>
+            </a:extLst>
+          </a:blip>
+          <a:stretch>
+            <a:fillRect/>
+          </a:stretch>
+        </p:blipFill>
+        <p:spPr>
+          <a:xfrm>
+            <a:off x="627100" y="2503327"/>
+            <a:ext cx="996432" cy="1188169"/>
+          </a:xfrm>
+          <a:prstGeom prst="rect">
+            <a:avLst/>
+          </a:prstGeom>
+        </p:spPr>
+      </p:pic>
+      <p:pic>
+        <p:nvPicPr>
+          <p:cNvPr id="31" name="Graphic 30">
+            <a:extLst>
+              <a:ext uri="{FF2B5EF4-FFF2-40B4-BE49-F238E27FC236}">
+                <a16:creationId xmlns:a16="http://schemas.microsoft.com/office/drawing/2014/main" id="{3CA2B5FC-3326-CD57-C0F4-A98FD6B1008D}"/>
+              </a:ext>
+            </a:extLst>
+          </p:cNvPr>
+          <p:cNvPicPr>
+            <a:picLocks noChangeAspect="1"/>
+          </p:cNvPicPr>
+          <p:nvPr/>
+        </p:nvPicPr>
+        <p:blipFill>
+          <a:blip r:embed="rId19">
+            <a:extLst>
+              <a:ext uri="{28A0092B-C50C-407E-A947-70E740481C1C}">
+                <a14:useLocalDpi xmlns:a14="http://schemas.microsoft.com/office/drawing/2010/main" val="0"/>
+              </a:ext>
+              <a:ext uri="{96DAC541-7B7A-43D3-8B79-37D633B846F1}">
+                <asvg:svgBlip xmlns:asvg="http://schemas.microsoft.com/office/drawing/2016/SVG/main" r:embed="rId20"/>
+              </a:ext>
+            </a:extLst>
+          </a:blip>
+          <a:stretch>
+            <a:fillRect/>
+          </a:stretch>
+        </p:blipFill>
+        <p:spPr>
+          <a:xfrm>
+            <a:off x="251340" y="637117"/>
+            <a:ext cx="1747953" cy="868460"/>
+          </a:xfrm>
+          <a:prstGeom prst="rect">
+            <a:avLst/>
+          </a:prstGeom>
+        </p:spPr>
+      </p:pic>
+      <p:pic>
+        <p:nvPicPr>
+          <p:cNvPr id="4" name="Picture 3">
+            <a:extLst>
+              <a:ext uri="{FF2B5EF4-FFF2-40B4-BE49-F238E27FC236}">
+                <a16:creationId xmlns:a16="http://schemas.microsoft.com/office/drawing/2014/main" id="{7A443A52-F251-1F82-3551-C1C7EBDACFE7}"/>
+              </a:ext>
+            </a:extLst>
+          </p:cNvPr>
+          <p:cNvPicPr>
+            <a:picLocks noChangeAspect="1"/>
+          </p:cNvPicPr>
+          <p:nvPr/>
+        </p:nvPicPr>
+        <p:blipFill rotWithShape="1">
+          <a:blip r:embed="rId21">
+            <a:extLst>
+              <a:ext uri="{28A0092B-C50C-407E-A947-70E740481C1C}">
+                <a14:useLocalDpi xmlns:a14="http://schemas.microsoft.com/office/drawing/2010/main" val="0"/>
+              </a:ext>
+            </a:extLst>
+          </a:blip>
+          <a:srcRect l="15421" t="23435" r="14437" b="26389"/>
+          <a:stretch/>
+        </p:blipFill>
+        <p:spPr>
+          <a:xfrm>
+            <a:off x="12065693" y="2667729"/>
+            <a:ext cx="2162372" cy="859364"/>
+          </a:xfrm>
+          <a:prstGeom prst="rect">
+            <a:avLst/>
+          </a:prstGeom>
+        </p:spPr>
+      </p:pic>
+      <p:pic>
+        <p:nvPicPr>
+          <p:cNvPr id="10" name="Picture 9" descr="A blue and black logo&#10;&#10;Description automatically generated">
+            <a:extLst>
+              <a:ext uri="{FF2B5EF4-FFF2-40B4-BE49-F238E27FC236}">
+                <a16:creationId xmlns:a16="http://schemas.microsoft.com/office/drawing/2014/main" id="{2FA303EA-8D47-E840-A93C-880AF35B24FA}"/>
+              </a:ext>
+            </a:extLst>
+          </p:cNvPr>
+          <p:cNvPicPr>
+            <a:picLocks noChangeAspect="1"/>
+          </p:cNvPicPr>
+          <p:nvPr/>
+        </p:nvPicPr>
+        <p:blipFill>
+          <a:blip r:embed="rId22">
+            <a:extLst>
+              <a:ext uri="{28A0092B-C50C-407E-A947-70E740481C1C}">
+                <a14:useLocalDpi xmlns:a14="http://schemas.microsoft.com/office/drawing/2010/main" val="0"/>
+              </a:ext>
+            </a:extLst>
+          </a:blip>
+          <a:stretch>
+            <a:fillRect/>
+          </a:stretch>
+        </p:blipFill>
+        <p:spPr>
+          <a:xfrm>
+            <a:off x="9548673" y="481168"/>
+            <a:ext cx="2098414" cy="1180358"/>
+          </a:xfrm>
+          <a:prstGeom prst="rect">
+            <a:avLst/>
+          </a:prstGeom>
+        </p:spPr>
+      </p:pic>
+      <p:pic>
+        <p:nvPicPr>
+          <p:cNvPr id="15" name="Picture 14" descr="A black and white logo&#10;&#10;Description automatically generated">
+            <a:extLst>
+              <a:ext uri="{FF2B5EF4-FFF2-40B4-BE49-F238E27FC236}">
+                <a16:creationId xmlns:a16="http://schemas.microsoft.com/office/drawing/2014/main" id="{A24143CC-E3E4-2AB2-55CF-93A89139ECBC}"/>
+              </a:ext>
+            </a:extLst>
+          </p:cNvPr>
+          <p:cNvPicPr>
+            <a:picLocks noChangeAspect="1"/>
+          </p:cNvPicPr>
+          <p:nvPr/>
+        </p:nvPicPr>
+        <p:blipFill rotWithShape="1">
+          <a:blip r:embed="rId23">
+            <a:extLst>
+              <a:ext uri="{28A0092B-C50C-407E-A947-70E740481C1C}">
+                <a14:useLocalDpi xmlns:a14="http://schemas.microsoft.com/office/drawing/2010/main" val="0"/>
+              </a:ext>
+            </a:extLst>
+          </a:blip>
+          <a:srcRect r="18858"/>
+          <a:stretch/>
+        </p:blipFill>
+        <p:spPr>
+          <a:xfrm>
+            <a:off x="2435051" y="4867493"/>
+            <a:ext cx="1941909" cy="646908"/>
+          </a:xfrm>
+          <a:prstGeom prst="rect">
+            <a:avLst/>
+          </a:prstGeom>
+        </p:spPr>
+      </p:pic>
+      <p:pic>
+        <p:nvPicPr>
+          <p:cNvPr id="18" name="Picture 17" descr="A blue and white logo&#10;&#10;Description automatically generated">
+            <a:extLst>
+              <a:ext uri="{FF2B5EF4-FFF2-40B4-BE49-F238E27FC236}">
+                <a16:creationId xmlns:a16="http://schemas.microsoft.com/office/drawing/2014/main" id="{50BA057F-37F2-A864-581E-D0568D4277AF}"/>
+              </a:ext>
+            </a:extLst>
+          </p:cNvPr>
+          <p:cNvPicPr>
+            <a:picLocks noChangeAspect="1"/>
+          </p:cNvPicPr>
+          <p:nvPr/>
+        </p:nvPicPr>
+        <p:blipFill>
+          <a:blip r:embed="rId24">
+            <a:extLst>
+              <a:ext uri="{28A0092B-C50C-407E-A947-70E740481C1C}">
+                <a14:useLocalDpi xmlns:a14="http://schemas.microsoft.com/office/drawing/2010/main" val="0"/>
+              </a:ext>
+            </a:extLst>
+          </a:blip>
+          <a:stretch>
+            <a:fillRect/>
+          </a:stretch>
+        </p:blipFill>
+        <p:spPr>
+          <a:xfrm>
+            <a:off x="5055419" y="4410388"/>
+            <a:ext cx="1571036" cy="1561118"/>
+          </a:xfrm>
+          <a:prstGeom prst="rect">
+            <a:avLst/>
+          </a:prstGeom>
+        </p:spPr>
+      </p:pic>
+      <p:pic>
+        <p:nvPicPr>
+          <p:cNvPr id="22" name="Picture 21">
+            <a:extLst>
+              <a:ext uri="{FF2B5EF4-FFF2-40B4-BE49-F238E27FC236}">
+                <a16:creationId xmlns:a16="http://schemas.microsoft.com/office/drawing/2014/main" id="{1DB979D0-E07E-F7D9-8193-C9F07BB882AA}"/>
+              </a:ext>
+            </a:extLst>
+          </p:cNvPr>
+          <p:cNvPicPr>
+            <a:picLocks noChangeAspect="1"/>
+          </p:cNvPicPr>
+          <p:nvPr/>
+        </p:nvPicPr>
+        <p:blipFill>
+          <a:blip r:embed="rId25">
+            <a:extLst>
+              <a:ext uri="{28A0092B-C50C-407E-A947-70E740481C1C}">
+                <a14:useLocalDpi xmlns:a14="http://schemas.microsoft.com/office/drawing/2010/main" val="0"/>
+              </a:ext>
+            </a:extLst>
+          </a:blip>
+          <a:stretch>
+            <a:fillRect/>
+          </a:stretch>
+        </p:blipFill>
+        <p:spPr>
+          <a:xfrm>
+            <a:off x="9696118" y="4838113"/>
+            <a:ext cx="1826674" cy="705669"/>
+          </a:xfrm>
+          <a:prstGeom prst="rect">
+            <a:avLst/>
+          </a:prstGeom>
+        </p:spPr>
+      </p:pic>
+      <p:pic>
+        <p:nvPicPr>
+          <p:cNvPr id="2" name="Graphic 1">
+            <a:extLst>
+              <a:ext uri="{FF2B5EF4-FFF2-40B4-BE49-F238E27FC236}">
+                <a16:creationId xmlns:a16="http://schemas.microsoft.com/office/drawing/2014/main" id="{203A6876-B40A-26B9-9CEF-C895695FE7E0}"/>
+              </a:ext>
+            </a:extLst>
+          </p:cNvPr>
+          <p:cNvPicPr>
+            <a:picLocks noChangeAspect="1"/>
+          </p:cNvPicPr>
+          <p:nvPr/>
+        </p:nvPicPr>
+        <p:blipFill>
+          <a:blip r:embed="rId26">
+            <a:extLst>
+              <a:ext uri="{28A0092B-C50C-407E-A947-70E740481C1C}">
+                <a14:useLocalDpi xmlns:a14="http://schemas.microsoft.com/office/drawing/2010/main" val="0"/>
+              </a:ext>
+              <a:ext uri="{96DAC541-7B7A-43D3-8B79-37D633B846F1}">
+                <asvg:svgBlip xmlns:asvg="http://schemas.microsoft.com/office/drawing/2016/SVG/main" r:embed="rId27"/>
+              </a:ext>
+            </a:extLst>
+          </a:blip>
+          <a:stretch>
+            <a:fillRect/>
+          </a:stretch>
+        </p:blipFill>
+        <p:spPr>
+          <a:xfrm>
+            <a:off x="12342916" y="4776066"/>
+            <a:ext cx="1607927" cy="829762"/>
+          </a:xfrm>
+          <a:prstGeom prst="rect">
+            <a:avLst/>
+          </a:prstGeom>
+        </p:spPr>
+      </p:pic>
     </p:spTree>
     <p:extLst>
       <p:ext uri="{BB962C8B-B14F-4D97-AF65-F5344CB8AC3E}">
